--- a/deliverables/Mihenk_Veri_Platformu_Sunum.pptx
+++ b/deliverables/Mihenk_Veri_Platformu_Sunum.pptx
@@ -513,7 +513,7 @@
           <a:lstStyle/>
           <a:p>
             <a:r>
-              <a:t>Mihenk taşı metaforu projenin tezi: veri kalitesi sonradan eklenen bir kontrol değil, mimarinin kendisi.</a:t>
+              <a:t>Veri kalitesi projede sonradan eklenen bir kontrol değil, mimarinin kendisi.</a:t>
             </a:r>
           </a:p>
         </p:txBody>
@@ -3785,49 +3785,28 @@
         </p:nvSpPr>
         <p:spPr>
           <a:xfrm>
-            <a:off x="7772400" y="4846320"/>
-            <a:ext cx="3840480" cy="822960"/>
-          </a:xfrm>
-          <a:prstGeom prst="rect">
-            <a:avLst/>
-          </a:prstGeom>
-          <a:noFill/>
-        </p:spPr>
-        <p:txBody>
-          <a:bodyPr wrap="square" lIns="0" rIns="0" tIns="0" bIns="0">
-            <a:spAutoFit/>
-          </a:bodyPr>
-          <a:lstStyle/>
-          <a:p>
-            <a:pPr>
-              <a:lnSpc>
-                <a:spcPts val="1600"/>
-              </a:lnSpc>
-            </a:pPr>
-            <a:r>
-              <a:rPr sz="1100" b="0" i="1">
-                <a:solidFill>
-                  <a:srgbClr val="9AA0A8"/>
-                </a:solidFill>
-                <a:latin typeface="Cambria"/>
-              </a:rPr>
-              <a:t>mihenk taşı: altının saflığını ölçmek için kullanılan koyu taş.</a:t>
-            </a:r>
-          </a:p>
-          <a:p>
-            <a:pPr>
-              <a:lnSpc>
-                <a:spcPts val="1600"/>
-              </a:lnSpc>
-            </a:pPr>
-            <a:r>
-              <a:rPr sz="1100" b="0" i="1">
-                <a:solidFill>
-                  <a:srgbClr val="9AA0A8"/>
-                </a:solidFill>
-                <a:latin typeface="Cambria"/>
-              </a:rPr>
-              <a:t>Verinin değeri, neye karşı ölçüldüğü kadardır.</a:t>
+            <a:off x="640080" y="5349240"/>
+            <a:ext cx="7315200" cy="320040"/>
+          </a:xfrm>
+          <a:prstGeom prst="rect">
+            <a:avLst/>
+          </a:prstGeom>
+          <a:noFill/>
+        </p:spPr>
+        <p:txBody>
+          <a:bodyPr wrap="square" lIns="0" rIns="0" tIns="0" bIns="0">
+            <a:spAutoFit/>
+          </a:bodyPr>
+          <a:lstStyle/>
+          <a:p>
+            <a:r>
+              <a:rPr sz="1250" b="0" i="0">
+                <a:solidFill>
+                  <a:srgbClr val="BF5B26"/>
+                </a:solidFill>
+                <a:latin typeface="Calibri"/>
+              </a:rPr>
+              <a:t>github.com/BurakOnce/Mihenk</a:t>
             </a:r>
           </a:p>
         </p:txBody>
@@ -3918,92 +3897,33 @@
           </a:p>
         </p:txBody>
       </p:sp>
-      <p:sp>
-        <p:nvSpPr>
-          <p:cNvPr id="4" name="Rounded Rectangle 3"/>
-          <p:cNvSpPr/>
-          <p:nvPr/>
-        </p:nvSpPr>
-        <p:spPr>
-          <a:xfrm>
-            <a:off x="640080" y="1554480"/>
-            <a:ext cx="5806440" cy="3931920"/>
-          </a:xfrm>
-          <a:prstGeom prst="roundRect">
-            <a:avLst>
-              <a:gd name="adj" fmla="val 5000"/>
-            </a:avLst>
-          </a:prstGeom>
-          <a:solidFill>
-            <a:srgbClr val="F3F1ED"/>
-          </a:solidFill>
-          <a:ln w="12700">
-            <a:solidFill>
-              <a:srgbClr val="D8D5CF"/>
-            </a:solidFill>
-          </a:ln>
-          <a:effectLst/>
-        </p:spPr>
-        <p:style>
-          <a:lnRef idx="1">
-            <a:schemeClr val="accent1"/>
-          </a:lnRef>
-          <a:fillRef idx="3">
-            <a:schemeClr val="accent1"/>
-          </a:fillRef>
-          <a:effectRef idx="2">
-            <a:schemeClr val="accent1"/>
-          </a:effectRef>
-          <a:fontRef idx="minor">
-            <a:schemeClr val="lt1"/>
-          </a:fontRef>
-        </p:style>
-        <p:txBody>
-          <a:bodyPr rtlCol="0" anchor="ctr"/>
-          <a:lstStyle/>
-          <a:p>
-            <a:pPr algn="ctr"/>
-          </a:p>
-        </p:txBody>
-      </p:sp>
+      <p:pic>
+        <p:nvPicPr>
+          <p:cNvPr id="4" name="Picture 3" descr="fabric_workspace.png"/>
+          <p:cNvPicPr>
+            <a:picLocks noChangeAspect="1"/>
+          </p:cNvPicPr>
+          <p:nvPr/>
+        </p:nvPicPr>
+        <p:blipFill>
+          <a:blip r:embed="rId2"/>
+          <a:stretch>
+            <a:fillRect/>
+          </a:stretch>
+        </p:blipFill>
+        <p:spPr>
+          <a:xfrm>
+            <a:off x="2100539" y="1554480"/>
+            <a:ext cx="2885521" cy="3931920"/>
+          </a:xfrm>
+          <a:prstGeom prst="rect">
+            <a:avLst/>
+          </a:prstGeom>
+        </p:spPr>
+      </p:pic>
       <p:sp>
         <p:nvSpPr>
           <p:cNvPr id="5" name="TextBox 4"/>
-          <p:cNvSpPr txBox="1"/>
-          <p:nvPr/>
-        </p:nvSpPr>
-        <p:spPr>
-          <a:xfrm>
-            <a:off x="640080" y="3383279"/>
-            <a:ext cx="5806440" cy="365760"/>
-          </a:xfrm>
-          <a:prstGeom prst="rect">
-            <a:avLst/>
-          </a:prstGeom>
-          <a:noFill/>
-        </p:spPr>
-        <p:txBody>
-          <a:bodyPr wrap="square" lIns="0" rIns="0" tIns="0" bIns="0">
-            <a:spAutoFit/>
-          </a:bodyPr>
-          <a:lstStyle/>
-          <a:p>
-            <a:pPr algn="ctr"/>
-            <a:r>
-              <a:rPr sz="1150" b="0" i="0">
-                <a:solidFill>
-                  <a:srgbClr val="8A8F98"/>
-                </a:solidFill>
-                <a:latin typeface="Calibri"/>
-              </a:rPr>
-              <a:t>[ fabric_workspace.png ]</a:t>
-            </a:r>
-          </a:p>
-        </p:txBody>
-      </p:sp>
-      <p:sp>
-        <p:nvSpPr>
-          <p:cNvPr id="6" name="TextBox 5"/>
           <p:cNvSpPr txBox="1"/>
           <p:nvPr/>
         </p:nvSpPr>
@@ -4037,7 +3957,7 @@
       </p:sp>
       <p:sp>
         <p:nvSpPr>
-          <p:cNvPr id="7" name="TextBox 6"/>
+          <p:cNvPr id="6" name="TextBox 5"/>
           <p:cNvSpPr txBox="1"/>
           <p:nvPr/>
         </p:nvSpPr>
@@ -4071,7 +3991,7 @@
       </p:sp>
       <p:sp>
         <p:nvSpPr>
-          <p:cNvPr id="8" name="TextBox 7"/>
+          <p:cNvPr id="7" name="TextBox 6"/>
           <p:cNvSpPr txBox="1"/>
           <p:nvPr/>
         </p:nvSpPr>
@@ -4110,7 +4030,7 @@
       </p:sp>
       <p:sp>
         <p:nvSpPr>
-          <p:cNvPr id="9" name="TextBox 8"/>
+          <p:cNvPr id="8" name="TextBox 7"/>
           <p:cNvSpPr txBox="1"/>
           <p:nvPr/>
         </p:nvSpPr>
@@ -4144,7 +4064,7 @@
       </p:sp>
       <p:sp>
         <p:nvSpPr>
-          <p:cNvPr id="10" name="TextBox 9"/>
+          <p:cNvPr id="9" name="TextBox 8"/>
           <p:cNvSpPr txBox="1"/>
           <p:nvPr/>
         </p:nvSpPr>
@@ -4183,7 +4103,7 @@
       </p:sp>
       <p:sp>
         <p:nvSpPr>
-          <p:cNvPr id="11" name="TextBox 10"/>
+          <p:cNvPr id="10" name="TextBox 9"/>
           <p:cNvSpPr txBox="1"/>
           <p:nvPr/>
         </p:nvSpPr>
@@ -4217,7 +4137,7 @@
       </p:sp>
       <p:sp>
         <p:nvSpPr>
-          <p:cNvPr id="12" name="TextBox 11"/>
+          <p:cNvPr id="11" name="TextBox 10"/>
           <p:cNvSpPr txBox="1"/>
           <p:nvPr/>
         </p:nvSpPr>
@@ -4256,7 +4176,7 @@
       </p:sp>
       <p:sp>
         <p:nvSpPr>
-          <p:cNvPr id="13" name="TextBox 12"/>
+          <p:cNvPr id="12" name="TextBox 11"/>
           <p:cNvSpPr txBox="1"/>
           <p:nvPr/>
         </p:nvSpPr>
@@ -4290,7 +4210,7 @@
       </p:sp>
       <p:sp>
         <p:nvSpPr>
-          <p:cNvPr id="14" name="TextBox 13"/>
+          <p:cNvPr id="13" name="TextBox 12"/>
           <p:cNvSpPr txBox="1"/>
           <p:nvPr/>
         </p:nvSpPr>
@@ -4329,7 +4249,7 @@
       </p:sp>
       <p:sp>
         <p:nvSpPr>
-          <p:cNvPr id="15" name="TextBox 14"/>
+          <p:cNvPr id="14" name="TextBox 13"/>
           <p:cNvSpPr txBox="1"/>
           <p:nvPr/>
         </p:nvSpPr>
@@ -4363,7 +4283,7 @@
       </p:sp>
       <p:sp>
         <p:nvSpPr>
-          <p:cNvPr id="16" name="TextBox 15"/>
+          <p:cNvPr id="15" name="TextBox 14"/>
           <p:cNvSpPr txBox="1"/>
           <p:nvPr/>
         </p:nvSpPr>
@@ -4402,7 +4322,7 @@
       </p:sp>
       <p:sp>
         <p:nvSpPr>
-          <p:cNvPr id="17" name="TextBox 16"/>
+          <p:cNvPr id="16" name="TextBox 15"/>
           <p:cNvSpPr txBox="1"/>
           <p:nvPr/>
         </p:nvSpPr>
@@ -9453,92 +9373,33 @@
           </a:p>
         </p:txBody>
       </p:sp>
-      <p:sp>
-        <p:nvSpPr>
-          <p:cNvPr id="12" name="Rounded Rectangle 11"/>
-          <p:cNvSpPr/>
-          <p:nvPr/>
-        </p:nvSpPr>
-        <p:spPr>
-          <a:xfrm>
-            <a:off x="6675120" y="1572768"/>
-            <a:ext cx="4892040" cy="3794760"/>
-          </a:xfrm>
-          <a:prstGeom prst="roundRect">
-            <a:avLst>
-              <a:gd name="adj" fmla="val 5000"/>
-            </a:avLst>
-          </a:prstGeom>
-          <a:solidFill>
-            <a:srgbClr val="F3F1ED"/>
-          </a:solidFill>
-          <a:ln w="12700">
-            <a:solidFill>
-              <a:srgbClr val="D8D5CF"/>
-            </a:solidFill>
-          </a:ln>
-          <a:effectLst/>
-        </p:spPr>
-        <p:style>
-          <a:lnRef idx="1">
-            <a:schemeClr val="accent1"/>
-          </a:lnRef>
-          <a:fillRef idx="3">
-            <a:schemeClr val="accent1"/>
-          </a:fillRef>
-          <a:effectRef idx="2">
-            <a:schemeClr val="accent1"/>
-          </a:effectRef>
-          <a:fontRef idx="minor">
-            <a:schemeClr val="lt1"/>
-          </a:fontRef>
-        </p:style>
-        <p:txBody>
-          <a:bodyPr rtlCol="0" anchor="ctr"/>
-          <a:lstStyle/>
-          <a:p>
-            <a:pPr algn="ctr"/>
-          </a:p>
-        </p:txBody>
-      </p:sp>
+      <p:pic>
+        <p:nvPicPr>
+          <p:cNvPr id="12" name="Picture 11" descr="fabric_pipeline.png"/>
+          <p:cNvPicPr>
+            <a:picLocks noChangeAspect="1"/>
+          </p:cNvPicPr>
+          <p:nvPr/>
+        </p:nvPicPr>
+        <p:blipFill>
+          <a:blip r:embed="rId2"/>
+          <a:stretch>
+            <a:fillRect/>
+          </a:stretch>
+        </p:blipFill>
+        <p:spPr>
+          <a:xfrm>
+            <a:off x="6675120" y="2369631"/>
+            <a:ext cx="4892040" cy="2201033"/>
+          </a:xfrm>
+          <a:prstGeom prst="rect">
+            <a:avLst/>
+          </a:prstGeom>
+        </p:spPr>
+      </p:pic>
       <p:sp>
         <p:nvSpPr>
           <p:cNvPr id="13" name="TextBox 12"/>
-          <p:cNvSpPr txBox="1"/>
-          <p:nvPr/>
-        </p:nvSpPr>
-        <p:spPr>
-          <a:xfrm>
-            <a:off x="6675120" y="3332988"/>
-            <a:ext cx="4892040" cy="365760"/>
-          </a:xfrm>
-          <a:prstGeom prst="rect">
-            <a:avLst/>
-          </a:prstGeom>
-          <a:noFill/>
-        </p:spPr>
-        <p:txBody>
-          <a:bodyPr wrap="square" lIns="0" rIns="0" tIns="0" bIns="0">
-            <a:spAutoFit/>
-          </a:bodyPr>
-          <a:lstStyle/>
-          <a:p>
-            <a:pPr algn="ctr"/>
-            <a:r>
-              <a:rPr sz="1150" b="0" i="0">
-                <a:solidFill>
-                  <a:srgbClr val="8A8F98"/>
-                </a:solidFill>
-                <a:latin typeface="Calibri"/>
-              </a:rPr>
-              <a:t>[ fabric_pipeline.png ]</a:t>
-            </a:r>
-          </a:p>
-        </p:txBody>
-      </p:sp>
-      <p:sp>
-        <p:nvSpPr>
-          <p:cNvPr id="14" name="TextBox 13"/>
           <p:cNvSpPr txBox="1"/>
           <p:nvPr/>
         </p:nvSpPr>
@@ -10600,7 +10461,7 @@
         <p:spPr>
           <a:xfrm>
             <a:off x="3108960" y="1572768"/>
-            <a:ext cx="4754880" cy="1051560"/>
+            <a:ext cx="4114800" cy="1097280"/>
           </a:xfrm>
           <a:prstGeom prst="rect">
             <a:avLst/>
@@ -10673,7 +10534,7 @@
         <p:spPr>
           <a:xfrm>
             <a:off x="3108960" y="2761488"/>
-            <a:ext cx="4754880" cy="1051560"/>
+            <a:ext cx="4114800" cy="1097280"/>
           </a:xfrm>
           <a:prstGeom prst="rect">
             <a:avLst/>
@@ -10746,7 +10607,7 @@
         <p:spPr>
           <a:xfrm>
             <a:off x="3108960" y="3950208"/>
-            <a:ext cx="4754880" cy="1051560"/>
+            <a:ext cx="4114800" cy="1097280"/>
           </a:xfrm>
           <a:prstGeom prst="rect">
             <a:avLst/>
@@ -10784,8 +10645,8 @@
         </p:nvSpPr>
         <p:spPr>
           <a:xfrm>
-            <a:off x="7635240" y="1572768"/>
-            <a:ext cx="3931920" cy="3611880"/>
+            <a:off x="8001000" y="1572768"/>
+            <a:ext cx="3520440" cy="3611880"/>
           </a:xfrm>
           <a:prstGeom prst="roundRect">
             <a:avLst>
@@ -10830,22 +10691,22 @@
         </p:nvSpPr>
         <p:spPr>
           <a:xfrm>
-            <a:off x="7909560" y="1783080"/>
-            <a:ext cx="3383280" cy="274320"/>
-          </a:xfrm>
-          <a:prstGeom prst="rect">
-            <a:avLst/>
-          </a:prstGeom>
-          <a:noFill/>
-        </p:spPr>
-        <p:txBody>
-          <a:bodyPr wrap="square" lIns="0" rIns="0" tIns="0" bIns="0">
-            <a:spAutoFit/>
-          </a:bodyPr>
-          <a:lstStyle/>
-          <a:p>
-            <a:r>
-              <a:rPr sz="1050" b="1" i="0">
+            <a:off x="8229600" y="1783080"/>
+            <a:ext cx="3017520" cy="274320"/>
+          </a:xfrm>
+          <a:prstGeom prst="rect">
+            <a:avLst/>
+          </a:prstGeom>
+          <a:noFill/>
+        </p:spPr>
+        <p:txBody>
+          <a:bodyPr wrap="square" lIns="0" rIns="0" tIns="0" bIns="0">
+            <a:spAutoFit/>
+          </a:bodyPr>
+          <a:lstStyle/>
+          <a:p>
+            <a:r>
+              <a:rPr sz="950" b="1" i="0">
                 <a:solidFill>
                   <a:srgbClr val="BF5B26"/>
                 </a:solidFill>
@@ -10864,22 +10725,22 @@
         </p:nvSpPr>
         <p:spPr>
           <a:xfrm>
-            <a:off x="7909560" y="2194560"/>
-            <a:ext cx="2377440" cy="274320"/>
-          </a:xfrm>
-          <a:prstGeom prst="rect">
-            <a:avLst/>
-          </a:prstGeom>
-          <a:noFill/>
-        </p:spPr>
-        <p:txBody>
-          <a:bodyPr wrap="square" lIns="0" rIns="0" tIns="0" bIns="0">
-            <a:spAutoFit/>
-          </a:bodyPr>
-          <a:lstStyle/>
-          <a:p>
-            <a:r>
-              <a:rPr sz="1050" b="0" i="0">
+            <a:off x="8229600" y="2194560"/>
+            <a:ext cx="1965960" cy="274320"/>
+          </a:xfrm>
+          <a:prstGeom prst="rect">
+            <a:avLst/>
+          </a:prstGeom>
+          <a:noFill/>
+        </p:spPr>
+        <p:txBody>
+          <a:bodyPr wrap="square" lIns="0" rIns="0" tIns="0" bIns="0">
+            <a:spAutoFit/>
+          </a:bodyPr>
+          <a:lstStyle/>
+          <a:p>
+            <a:r>
+              <a:rPr sz="950" b="0" i="0">
                 <a:solidFill>
                   <a:srgbClr val="444B57"/>
                 </a:solidFill>
@@ -10898,7 +10759,7 @@
         </p:nvSpPr>
         <p:spPr>
           <a:xfrm>
-            <a:off x="10241280" y="2194560"/>
+            <a:off x="10195560" y="2194560"/>
             <a:ext cx="1051560" cy="274320"/>
           </a:xfrm>
           <a:prstGeom prst="rect">
@@ -10914,7 +10775,7 @@
           <a:p>
             <a:pPr algn="r"/>
             <a:r>
-              <a:rPr sz="1050" b="1" i="0">
+              <a:rPr sz="950" b="1" i="0">
                 <a:solidFill>
                   <a:srgbClr val="22252B"/>
                 </a:solidFill>
@@ -10933,22 +10794,22 @@
         </p:nvSpPr>
         <p:spPr>
           <a:xfrm>
-            <a:off x="7909560" y="2551176"/>
-            <a:ext cx="2377440" cy="274320"/>
-          </a:xfrm>
-          <a:prstGeom prst="rect">
-            <a:avLst/>
-          </a:prstGeom>
-          <a:noFill/>
-        </p:spPr>
-        <p:txBody>
-          <a:bodyPr wrap="square" lIns="0" rIns="0" tIns="0" bIns="0">
-            <a:spAutoFit/>
-          </a:bodyPr>
-          <a:lstStyle/>
-          <a:p>
-            <a:r>
-              <a:rPr sz="1050" b="0" i="0">
+            <a:off x="8229600" y="2551176"/>
+            <a:ext cx="1965960" cy="274320"/>
+          </a:xfrm>
+          <a:prstGeom prst="rect">
+            <a:avLst/>
+          </a:prstGeom>
+          <a:noFill/>
+        </p:spPr>
+        <p:txBody>
+          <a:bodyPr wrap="square" lIns="0" rIns="0" tIns="0" bIns="0">
+            <a:spAutoFit/>
+          </a:bodyPr>
+          <a:lstStyle/>
+          <a:p>
+            <a:r>
+              <a:rPr sz="950" b="0" i="0">
                 <a:solidFill>
                   <a:srgbClr val="444B57"/>
                 </a:solidFill>
@@ -10967,7 +10828,7 @@
         </p:nvSpPr>
         <p:spPr>
           <a:xfrm>
-            <a:off x="10241280" y="2551176"/>
+            <a:off x="10195560" y="2551176"/>
             <a:ext cx="1051560" cy="274320"/>
           </a:xfrm>
           <a:prstGeom prst="rect">
@@ -10983,7 +10844,7 @@
           <a:p>
             <a:pPr algn="r"/>
             <a:r>
-              <a:rPr sz="1050" b="1" i="0">
+              <a:rPr sz="950" b="1" i="0">
                 <a:solidFill>
                   <a:srgbClr val="22252B"/>
                 </a:solidFill>
@@ -11002,22 +10863,22 @@
         </p:nvSpPr>
         <p:spPr>
           <a:xfrm>
-            <a:off x="7909560" y="2907791"/>
-            <a:ext cx="2377440" cy="274320"/>
-          </a:xfrm>
-          <a:prstGeom prst="rect">
-            <a:avLst/>
-          </a:prstGeom>
-          <a:noFill/>
-        </p:spPr>
-        <p:txBody>
-          <a:bodyPr wrap="square" lIns="0" rIns="0" tIns="0" bIns="0">
-            <a:spAutoFit/>
-          </a:bodyPr>
-          <a:lstStyle/>
-          <a:p>
-            <a:r>
-              <a:rPr sz="1050" b="0" i="0">
+            <a:off x="8229600" y="2907791"/>
+            <a:ext cx="1965960" cy="274320"/>
+          </a:xfrm>
+          <a:prstGeom prst="rect">
+            <a:avLst/>
+          </a:prstGeom>
+          <a:noFill/>
+        </p:spPr>
+        <p:txBody>
+          <a:bodyPr wrap="square" lIns="0" rIns="0" tIns="0" bIns="0">
+            <a:spAutoFit/>
+          </a:bodyPr>
+          <a:lstStyle/>
+          <a:p>
+            <a:r>
+              <a:rPr sz="950" b="0" i="0">
                 <a:solidFill>
                   <a:srgbClr val="444B57"/>
                 </a:solidFill>
@@ -11036,7 +10897,7 @@
         </p:nvSpPr>
         <p:spPr>
           <a:xfrm>
-            <a:off x="10241280" y="2907791"/>
+            <a:off x="10195560" y="2907791"/>
             <a:ext cx="1051560" cy="274320"/>
           </a:xfrm>
           <a:prstGeom prst="rect">
@@ -11052,7 +10913,7 @@
           <a:p>
             <a:pPr algn="r"/>
             <a:r>
-              <a:rPr sz="1050" b="1" i="0">
+              <a:rPr sz="950" b="1" i="0">
                 <a:solidFill>
                   <a:srgbClr val="22252B"/>
                 </a:solidFill>
@@ -11071,22 +10932,22 @@
         </p:nvSpPr>
         <p:spPr>
           <a:xfrm>
-            <a:off x="7909560" y="3264408"/>
-            <a:ext cx="2377440" cy="274320"/>
-          </a:xfrm>
-          <a:prstGeom prst="rect">
-            <a:avLst/>
-          </a:prstGeom>
-          <a:noFill/>
-        </p:spPr>
-        <p:txBody>
-          <a:bodyPr wrap="square" lIns="0" rIns="0" tIns="0" bIns="0">
-            <a:spAutoFit/>
-          </a:bodyPr>
-          <a:lstStyle/>
-          <a:p>
-            <a:r>
-              <a:rPr sz="1050" b="0" i="0">
+            <a:off x="8229600" y="3264408"/>
+            <a:ext cx="1965960" cy="274320"/>
+          </a:xfrm>
+          <a:prstGeom prst="rect">
+            <a:avLst/>
+          </a:prstGeom>
+          <a:noFill/>
+        </p:spPr>
+        <p:txBody>
+          <a:bodyPr wrap="square" lIns="0" rIns="0" tIns="0" bIns="0">
+            <a:spAutoFit/>
+          </a:bodyPr>
+          <a:lstStyle/>
+          <a:p>
+            <a:r>
+              <a:rPr sz="950" b="0" i="0">
                 <a:solidFill>
                   <a:srgbClr val="444B57"/>
                 </a:solidFill>
@@ -11105,7 +10966,7 @@
         </p:nvSpPr>
         <p:spPr>
           <a:xfrm>
-            <a:off x="10241280" y="3264408"/>
+            <a:off x="10195560" y="3264408"/>
             <a:ext cx="1051560" cy="274320"/>
           </a:xfrm>
           <a:prstGeom prst="rect">
@@ -11121,7 +10982,7 @@
           <a:p>
             <a:pPr algn="r"/>
             <a:r>
-              <a:rPr sz="1050" b="1" i="0">
+              <a:rPr sz="950" b="1" i="0">
                 <a:solidFill>
                   <a:srgbClr val="22252B"/>
                 </a:solidFill>
@@ -11140,22 +11001,22 @@
         </p:nvSpPr>
         <p:spPr>
           <a:xfrm>
-            <a:off x="7909560" y="3621024"/>
-            <a:ext cx="2377440" cy="274320"/>
-          </a:xfrm>
-          <a:prstGeom prst="rect">
-            <a:avLst/>
-          </a:prstGeom>
-          <a:noFill/>
-        </p:spPr>
-        <p:txBody>
-          <a:bodyPr wrap="square" lIns="0" rIns="0" tIns="0" bIns="0">
-            <a:spAutoFit/>
-          </a:bodyPr>
-          <a:lstStyle/>
-          <a:p>
-            <a:r>
-              <a:rPr sz="1050" b="0" i="0">
+            <a:off x="8229600" y="3621024"/>
+            <a:ext cx="1965960" cy="274320"/>
+          </a:xfrm>
+          <a:prstGeom prst="rect">
+            <a:avLst/>
+          </a:prstGeom>
+          <a:noFill/>
+        </p:spPr>
+        <p:txBody>
+          <a:bodyPr wrap="square" lIns="0" rIns="0" tIns="0" bIns="0">
+            <a:spAutoFit/>
+          </a:bodyPr>
+          <a:lstStyle/>
+          <a:p>
+            <a:r>
+              <a:rPr sz="950" b="0" i="0">
                 <a:solidFill>
                   <a:srgbClr val="444B57"/>
                 </a:solidFill>
@@ -11174,7 +11035,7 @@
         </p:nvSpPr>
         <p:spPr>
           <a:xfrm>
-            <a:off x="10241280" y="3621024"/>
+            <a:off x="10195560" y="3621024"/>
             <a:ext cx="1051560" cy="274320"/>
           </a:xfrm>
           <a:prstGeom prst="rect">
@@ -11190,7 +11051,7 @@
           <a:p>
             <a:pPr algn="r"/>
             <a:r>
-              <a:rPr sz="1050" b="1" i="0">
+              <a:rPr sz="950" b="1" i="0">
                 <a:solidFill>
                   <a:srgbClr val="22252B"/>
                 </a:solidFill>
@@ -11209,22 +11070,22 @@
         </p:nvSpPr>
         <p:spPr>
           <a:xfrm>
-            <a:off x="7909560" y="3977639"/>
-            <a:ext cx="2377440" cy="274320"/>
-          </a:xfrm>
-          <a:prstGeom prst="rect">
-            <a:avLst/>
-          </a:prstGeom>
-          <a:noFill/>
-        </p:spPr>
-        <p:txBody>
-          <a:bodyPr wrap="square" lIns="0" rIns="0" tIns="0" bIns="0">
-            <a:spAutoFit/>
-          </a:bodyPr>
-          <a:lstStyle/>
-          <a:p>
-            <a:r>
-              <a:rPr sz="1050" b="0" i="0">
+            <a:off x="8229600" y="3977639"/>
+            <a:ext cx="1965960" cy="274320"/>
+          </a:xfrm>
+          <a:prstGeom prst="rect">
+            <a:avLst/>
+          </a:prstGeom>
+          <a:noFill/>
+        </p:spPr>
+        <p:txBody>
+          <a:bodyPr wrap="square" lIns="0" rIns="0" tIns="0" bIns="0">
+            <a:spAutoFit/>
+          </a:bodyPr>
+          <a:lstStyle/>
+          <a:p>
+            <a:r>
+              <a:rPr sz="950" b="0" i="0">
                 <a:solidFill>
                   <a:srgbClr val="444B57"/>
                 </a:solidFill>
@@ -11243,7 +11104,7 @@
         </p:nvSpPr>
         <p:spPr>
           <a:xfrm>
-            <a:off x="10241280" y="3977639"/>
+            <a:off x="10195560" y="3977639"/>
             <a:ext cx="1051560" cy="274320"/>
           </a:xfrm>
           <a:prstGeom prst="rect">
@@ -11259,7 +11120,7 @@
           <a:p>
             <a:pPr algn="r"/>
             <a:r>
-              <a:rPr sz="1050" b="1" i="0">
+              <a:rPr sz="950" b="1" i="0">
                 <a:solidFill>
                   <a:srgbClr val="22252B"/>
                 </a:solidFill>
@@ -11278,22 +11139,22 @@
         </p:nvSpPr>
         <p:spPr>
           <a:xfrm>
-            <a:off x="7909560" y="4334256"/>
-            <a:ext cx="2377440" cy="274320"/>
-          </a:xfrm>
-          <a:prstGeom prst="rect">
-            <a:avLst/>
-          </a:prstGeom>
-          <a:noFill/>
-        </p:spPr>
-        <p:txBody>
-          <a:bodyPr wrap="square" lIns="0" rIns="0" tIns="0" bIns="0">
-            <a:spAutoFit/>
-          </a:bodyPr>
-          <a:lstStyle/>
-          <a:p>
-            <a:r>
-              <a:rPr sz="1050" b="0" i="0">
+            <a:off x="8229600" y="4334256"/>
+            <a:ext cx="1965960" cy="274320"/>
+          </a:xfrm>
+          <a:prstGeom prst="rect">
+            <a:avLst/>
+          </a:prstGeom>
+          <a:noFill/>
+        </p:spPr>
+        <p:txBody>
+          <a:bodyPr wrap="square" lIns="0" rIns="0" tIns="0" bIns="0">
+            <a:spAutoFit/>
+          </a:bodyPr>
+          <a:lstStyle/>
+          <a:p>
+            <a:r>
+              <a:rPr sz="950" b="0" i="0">
                 <a:solidFill>
                   <a:srgbClr val="444B57"/>
                 </a:solidFill>
@@ -11312,7 +11173,7 @@
         </p:nvSpPr>
         <p:spPr>
           <a:xfrm>
-            <a:off x="10241280" y="4334256"/>
+            <a:off x="10195560" y="4334256"/>
             <a:ext cx="1051560" cy="274320"/>
           </a:xfrm>
           <a:prstGeom prst="rect">
@@ -11328,7 +11189,7 @@
           <a:p>
             <a:pPr algn="r"/>
             <a:r>
-              <a:rPr sz="1050" b="1" i="0">
+              <a:rPr sz="950" b="1" i="0">
                 <a:solidFill>
                   <a:srgbClr val="22252B"/>
                 </a:solidFill>
@@ -11347,22 +11208,22 @@
         </p:nvSpPr>
         <p:spPr>
           <a:xfrm>
-            <a:off x="7909560" y="4690872"/>
-            <a:ext cx="2377440" cy="274320"/>
-          </a:xfrm>
-          <a:prstGeom prst="rect">
-            <a:avLst/>
-          </a:prstGeom>
-          <a:noFill/>
-        </p:spPr>
-        <p:txBody>
-          <a:bodyPr wrap="square" lIns="0" rIns="0" tIns="0" bIns="0">
-            <a:spAutoFit/>
-          </a:bodyPr>
-          <a:lstStyle/>
-          <a:p>
-            <a:r>
-              <a:rPr sz="1050" b="0" i="0">
+            <a:off x="8229600" y="4690872"/>
+            <a:ext cx="1965960" cy="274320"/>
+          </a:xfrm>
+          <a:prstGeom prst="rect">
+            <a:avLst/>
+          </a:prstGeom>
+          <a:noFill/>
+        </p:spPr>
+        <p:txBody>
+          <a:bodyPr wrap="square" lIns="0" rIns="0" tIns="0" bIns="0">
+            <a:spAutoFit/>
+          </a:bodyPr>
+          <a:lstStyle/>
+          <a:p>
+            <a:r>
+              <a:rPr sz="950" b="0" i="0">
                 <a:solidFill>
                   <a:srgbClr val="444B57"/>
                 </a:solidFill>
@@ -11381,7 +11242,7 @@
         </p:nvSpPr>
         <p:spPr>
           <a:xfrm>
-            <a:off x="10241280" y="4690872"/>
+            <a:off x="10195560" y="4690872"/>
             <a:ext cx="1051560" cy="274320"/>
           </a:xfrm>
           <a:prstGeom prst="rect">
@@ -11397,7 +11258,7 @@
           <a:p>
             <a:pPr algn="r"/>
             <a:r>
-              <a:rPr sz="1050" b="1" i="0">
+              <a:rPr sz="950" b="1" i="0">
                 <a:solidFill>
                   <a:srgbClr val="22252B"/>
                 </a:solidFill>
@@ -12364,16 +12225,40 @@
           </a:p>
         </p:txBody>
       </p:sp>
-      <p:sp>
-        <p:nvSpPr>
-          <p:cNvPr id="4" name="Rounded Rectangle 3"/>
+      <p:pic>
+        <p:nvPicPr>
+          <p:cNvPr id="4" name="Picture 3" descr="powerbi_report.png"/>
+          <p:cNvPicPr>
+            <a:picLocks noChangeAspect="1"/>
+          </p:cNvPicPr>
+          <p:nvPr/>
+        </p:nvPicPr>
+        <p:blipFill>
+          <a:blip r:embed="rId2"/>
+          <a:stretch>
+            <a:fillRect/>
+          </a:stretch>
+        </p:blipFill>
+        <p:spPr>
+          <a:xfrm>
+            <a:off x="721891" y="1508760"/>
+            <a:ext cx="7608777" cy="4206240"/>
+          </a:xfrm>
+          <a:prstGeom prst="rect">
+            <a:avLst/>
+          </a:prstGeom>
+        </p:spPr>
+      </p:pic>
+      <p:sp>
+        <p:nvSpPr>
+          <p:cNvPr id="5" name="Rounded Rectangle 4"/>
           <p:cNvSpPr/>
           <p:nvPr/>
         </p:nvSpPr>
         <p:spPr>
           <a:xfrm>
-            <a:off x="640080" y="1508760"/>
-            <a:ext cx="7772400" cy="4206240"/>
+            <a:off x="8641080" y="1508760"/>
+            <a:ext cx="2926080" cy="4206240"/>
           </a:xfrm>
           <a:prstGeom prst="roundRect">
             <a:avLst>
@@ -12383,10 +12268,8 @@
           <a:solidFill>
             <a:srgbClr val="F3F1ED"/>
           </a:solidFill>
-          <a:ln w="12700">
-            <a:solidFill>
-              <a:srgbClr val="D8D5CF"/>
-            </a:solidFill>
+          <a:ln>
+            <a:noFill/>
           </a:ln>
           <a:effectLst/>
         </p:spPr>
@@ -12414,88 +12297,7 @@
       </p:sp>
       <p:sp>
         <p:nvSpPr>
-          <p:cNvPr id="5" name="TextBox 4"/>
-          <p:cNvSpPr txBox="1"/>
-          <p:nvPr/>
-        </p:nvSpPr>
-        <p:spPr>
-          <a:xfrm>
-            <a:off x="640080" y="3474720"/>
-            <a:ext cx="7772400" cy="365760"/>
-          </a:xfrm>
-          <a:prstGeom prst="rect">
-            <a:avLst/>
-          </a:prstGeom>
-          <a:noFill/>
-        </p:spPr>
-        <p:txBody>
-          <a:bodyPr wrap="square" lIns="0" rIns="0" tIns="0" bIns="0">
-            <a:spAutoFit/>
-          </a:bodyPr>
-          <a:lstStyle/>
-          <a:p>
-            <a:pPr algn="ctr"/>
-            <a:r>
-              <a:rPr sz="1150" b="0" i="0">
-                <a:solidFill>
-                  <a:srgbClr val="8A8F98"/>
-                </a:solidFill>
-                <a:latin typeface="Calibri"/>
-              </a:rPr>
-              <a:t>[ powerbi_report.png ]</a:t>
-            </a:r>
-          </a:p>
-        </p:txBody>
-      </p:sp>
-      <p:sp>
-        <p:nvSpPr>
-          <p:cNvPr id="6" name="Rounded Rectangle 5"/>
-          <p:cNvSpPr/>
-          <p:nvPr/>
-        </p:nvSpPr>
-        <p:spPr>
-          <a:xfrm>
-            <a:off x="8641080" y="1508760"/>
-            <a:ext cx="2926080" cy="4206240"/>
-          </a:xfrm>
-          <a:prstGeom prst="roundRect">
-            <a:avLst>
-              <a:gd name="adj" fmla="val 5000"/>
-            </a:avLst>
-          </a:prstGeom>
-          <a:solidFill>
-            <a:srgbClr val="F3F1ED"/>
-          </a:solidFill>
-          <a:ln>
-            <a:noFill/>
-          </a:ln>
-          <a:effectLst/>
-        </p:spPr>
-        <p:style>
-          <a:lnRef idx="1">
-            <a:schemeClr val="accent1"/>
-          </a:lnRef>
-          <a:fillRef idx="3">
-            <a:schemeClr val="accent1"/>
-          </a:fillRef>
-          <a:effectRef idx="2">
-            <a:schemeClr val="accent1"/>
-          </a:effectRef>
-          <a:fontRef idx="minor">
-            <a:schemeClr val="lt1"/>
-          </a:fontRef>
-        </p:style>
-        <p:txBody>
-          <a:bodyPr rtlCol="0" anchor="ctr"/>
-          <a:lstStyle/>
-          <a:p>
-            <a:pPr algn="ctr"/>
-          </a:p>
-        </p:txBody>
-      </p:sp>
-      <p:sp>
-        <p:nvSpPr>
-          <p:cNvPr id="7" name="TextBox 6"/>
+          <p:cNvPr id="6" name="TextBox 5"/>
           <p:cNvSpPr txBox="1"/>
           <p:nvPr/>
         </p:nvSpPr>
@@ -12529,7 +12331,7 @@
       </p:sp>
       <p:sp>
         <p:nvSpPr>
-          <p:cNvPr id="8" name="TextBox 7"/>
+          <p:cNvPr id="7" name="TextBox 6"/>
           <p:cNvSpPr txBox="1"/>
           <p:nvPr/>
         </p:nvSpPr>
@@ -12563,7 +12365,7 @@
       </p:sp>
       <p:sp>
         <p:nvSpPr>
-          <p:cNvPr id="9" name="TextBox 8"/>
+          <p:cNvPr id="8" name="TextBox 7"/>
           <p:cNvSpPr txBox="1"/>
           <p:nvPr/>
         </p:nvSpPr>
@@ -12618,7 +12420,7 @@
       </p:sp>
       <p:sp>
         <p:nvSpPr>
-          <p:cNvPr id="10" name="TextBox 9"/>
+          <p:cNvPr id="9" name="TextBox 8"/>
           <p:cNvSpPr txBox="1"/>
           <p:nvPr/>
         </p:nvSpPr>
@@ -12652,7 +12454,7 @@
       </p:sp>
       <p:sp>
         <p:nvSpPr>
-          <p:cNvPr id="11" name="TextBox 10"/>
+          <p:cNvPr id="10" name="TextBox 9"/>
           <p:cNvSpPr txBox="1"/>
           <p:nvPr/>
         </p:nvSpPr>
@@ -12707,7 +12509,7 @@
       </p:sp>
       <p:sp>
         <p:nvSpPr>
-          <p:cNvPr id="12" name="TextBox 11"/>
+          <p:cNvPr id="11" name="TextBox 10"/>
           <p:cNvSpPr txBox="1"/>
           <p:nvPr/>
         </p:nvSpPr>
@@ -12741,7 +12543,7 @@
       </p:sp>
       <p:sp>
         <p:nvSpPr>
-          <p:cNvPr id="13" name="TextBox 12"/>
+          <p:cNvPr id="12" name="TextBox 11"/>
           <p:cNvSpPr txBox="1"/>
           <p:nvPr/>
         </p:nvSpPr>
@@ -12780,7 +12582,7 @@
       </p:sp>
       <p:sp>
         <p:nvSpPr>
-          <p:cNvPr id="14" name="TextBox 13"/>
+          <p:cNvPr id="13" name="TextBox 12"/>
           <p:cNvSpPr txBox="1"/>
           <p:nvPr/>
         </p:nvSpPr>
@@ -12819,7 +12621,7 @@
       </p:sp>
       <p:sp>
         <p:nvSpPr>
-          <p:cNvPr id="15" name="TextBox 14"/>
+          <p:cNvPr id="14" name="TextBox 13"/>
           <p:cNvSpPr txBox="1"/>
           <p:nvPr/>
         </p:nvSpPr>
